--- a/backend/test/fixtures/sample.pptx
+++ b/backend/test/fixtures/sample.pptx
@@ -7,7 +7,7 @@
         <p:txBody>
           <a:p>
             <a:r>
-              <a:t>Hello PPTX World</a:t>
+              <a:t>Hello PPTX World! This is a valid sample document created for unit testing text extraction. It contains well over one hundred characters of selectable text.</a:t>
             </a:r>
           </a:p>
         </p:txBody>
